--- a/public/fun/pack/pptx/reviewpro/보장점검양식프리미엄_48_가족점검_일렉트릭바이올렛.pptx
+++ b/public/fun/pack/pptx/reviewpro/보장점검양식프리미엄_48_가족점검_일렉트릭바이올렛.pptx
@@ -112,12 +112,12 @@
   <p:extLst>
     <p:ext uri="{521415D9-36F7-43E2-AB2F-B90AF26B5E84}">
       <p14:sectionLst xmlns:p14="http://schemas.microsoft.com/office/powerpoint/2010/main">
-        <p14:section name="시작" id="{5693A962-802A-46BC-9E08-E36AEAEC4AE1}">
+        <p14:section name="시작" id="{C30C00EB-15D1-40B4-BC23-E28F2593C0D1}">
           <p14:sldIdLst>
             <p14:sldId id="256"/>
           </p14:sldIdLst>
         </p14:section>
-        <p14:section name="본문" id="{2ED53E9B-C3AF-4C78-AE6D-7720663B7E49}">
+        <p14:section name="본문" id="{01121453-A510-4432-A40D-B3D0BA136AA6}">
           <p14:sldIdLst>
             <p14:sldId id="257"/>
             <p14:sldId id="258"/>
@@ -2759,7 +2759,7 @@
             </a:lvl1pPr>
           </a:lstStyle>
           <a:p>
-            <a:fld id="{7A951897-FFE5-4C3A-BE07-0A70719855A0}" type="slidenum">
+            <a:fld id="{3D076BA5-9D9B-4AEE-92DD-867BFA3C851B}" type="slidenum">
               <a:rPr lang="en-US"/>
               <a:t>‹#›</a:t>
             </a:fld>
@@ -5254,7 +5254,7 @@
             </a:lvl1pPr>
           </a:lstStyle>
           <a:p>
-            <a:fld id="{E038D86D-EFC6-4B41-843D-1B5E59ADAD85}" type="slidenum">
+            <a:fld id="{A8B7E0E0-939A-467C-A0BB-4608C8E19FC4}" type="slidenum">
               <a:rPr lang="en-US"/>
               <a:t>‹#›</a:t>
             </a:fld>
@@ -6544,7 +6544,7 @@
             </a:lvl1pPr>
           </a:lstStyle>
           <a:p>
-            <a:fld id="{7C045B82-4EB2-411D-99A4-AB38FDD16A4A}" type="slidenum">
+            <a:fld id="{1EA31D35-263A-4D15-A169-E81A45886031}" type="slidenum">
               <a:rPr lang="en-US"/>
               <a:t>‹#›</a:t>
             </a:fld>
@@ -8069,7 +8069,7 @@
           <a:p>
             <a:r>
               <a:rPr lang="ko-KR"/>
-              <a:t>가족 점검 · 0000. 00. 00</a:t>
+              <a:t>가족 점검 · 날짜 입력</a:t>
             </a:r>
           </a:p>
           <a:p>
@@ -8160,7 +8160,7 @@
           <a:bodyPr/>
           <a:lstStyle/>
           <a:p>
-            <a:fld id="{8B7AB238-E658-44AD-9F5D-8B9AD2431D44}" type="slidenum">
+            <a:fld id="{301F6E45-D7BD-4B8D-A711-C57910717EC0}" type="slidenum">
               <a:rPr lang="en-US"/>
               <a:t>‹#›</a:t>
             </a:fld>
@@ -9070,7 +9070,7 @@
           <a:bodyPr/>
           <a:lstStyle/>
           <a:p>
-            <a:fld id="{727AA0D6-B23C-49E4-ABF7-1D7728100FFF}" type="slidenum">
+            <a:fld id="{2F87AA0D-42F2-44AB-98B7-FDE952FD9A0D}" type="slidenum">
               <a:rPr lang="en-US"/>
               <a:t>‹#›</a:t>
             </a:fld>
@@ -10576,7 +10576,7 @@
           <a:bodyPr/>
           <a:lstStyle/>
           <a:p>
-            <a:fld id="{BE5D6C1E-C5DF-424A-9A2F-95B92166209A}" type="slidenum">
+            <a:fld id="{8A52051B-AD98-475F-973A-6EE603988E72}" type="slidenum">
               <a:rPr lang="en-US"/>
               <a:t>‹#›</a:t>
             </a:fld>
@@ -12126,7 +12126,7 @@
           <a:bodyPr/>
           <a:lstStyle/>
           <a:p>
-            <a:fld id="{AF690702-B3F6-45E0-88C6-5567CAC104DB}" type="slidenum">
+            <a:fld id="{B9ABBA19-EBB8-4988-B3E0-8D8053AC5454}" type="slidenum">
               <a:rPr lang="en-US"/>
               <a:t>‹#›</a:t>
             </a:fld>
@@ -13078,7 +13078,7 @@
           <a:bodyPr/>
           <a:lstStyle/>
           <a:p>
-            <a:fld id="{CF4299C9-5E5E-4526-A888-563F1B4087E1}" type="slidenum">
+            <a:fld id="{E5C756D6-5F39-444B-B0A9-0836BE7F9EEF}" type="slidenum">
               <a:rPr lang="en-US"/>
               <a:t>‹#›</a:t>
             </a:fld>
